--- a/curriculum/M01/W11/L01/slides.pptx
+++ b/curriculum/M01/W11/L01/slides.pptx
@@ -17648,11 +17648,40 @@
                 <a:ea typeface="Malgun Gothic"/>
                 <a:cs typeface="Malgun Gothic"/>
               </a:rPr>
-              <a:t>: 평소에는 거의 발현되지 않고, 염증 매개체와 성장인자가 발현을 유도한다. 2. </a:t>
-            </a:r>
+              <a:t>: 평소에는 거의 발현되지 않고, 염증 매개체와 성장인자가 발현을 유도한다.</a:t>
+            </a:r>
+          </a:p>
+          <a:p>
+            <a:pPr>
+              <a:spcAft>
+                <a:spcPts val="900"/>
+              </a:spcAft>
+            </a:pPr>
             <a:r>
               <a:rPr sz="1400" b="1" i="0">
                 <a:solidFill>
+                  <a:srgbClr val="F2B705"/>
+                </a:solidFill>
+                <a:latin typeface="Malgun Gothic"/>
+                <a:ea typeface="Malgun Gothic"/>
+                <a:cs typeface="Malgun Gothic"/>
+              </a:rPr>
+              <a:t>•  </a:t>
+            </a:r>
+            <a:r>
+              <a:rPr sz="1400" b="0" i="0">
+                <a:solidFill>
+                  <a:srgbClr val="11202B"/>
+                </a:solidFill>
+                <a:latin typeface="Malgun Gothic"/>
+                <a:ea typeface="Malgun Gothic"/>
+                <a:cs typeface="Malgun Gothic"/>
+              </a:rPr>
+              <a:t>2. </a:t>
+            </a:r>
+            <a:r>
+              <a:rPr sz="1400" b="1" i="0">
+                <a:solidFill>
                   <a:srgbClr val="11202B"/>
                 </a:solidFill>
                 <a:latin typeface="Malgun Gothic"/>
@@ -17670,7 +17699,36 @@
                 <a:ea typeface="Malgun Gothic"/>
                 <a:cs typeface="Malgun Gothic"/>
               </a:rPr>
-              <a:t>: 비활성 전구체(zymogen)로 분비되어 세포 밖에서 절단되어야 활성을 얻는다. 3. </a:t>
+              <a:t>: 비활성 전구체(zymogen)로 분비되어 세포 밖에서 절단되어야 활성을 얻는다.</a:t>
+            </a:r>
+          </a:p>
+          <a:p>
+            <a:pPr>
+              <a:spcAft>
+                <a:spcPts val="900"/>
+              </a:spcAft>
+            </a:pPr>
+            <a:r>
+              <a:rPr sz="1400" b="1" i="0">
+                <a:solidFill>
+                  <a:srgbClr val="F2B705"/>
+                </a:solidFill>
+                <a:latin typeface="Malgun Gothic"/>
+                <a:ea typeface="Malgun Gothic"/>
+                <a:cs typeface="Malgun Gothic"/>
+              </a:rPr>
+              <a:t>•  </a:t>
+            </a:r>
+            <a:r>
+              <a:rPr sz="1400" b="0" i="0">
+                <a:solidFill>
+                  <a:srgbClr val="11202B"/>
+                </a:solidFill>
+                <a:latin typeface="Malgun Gothic"/>
+                <a:ea typeface="Malgun Gothic"/>
+                <a:cs typeface="Malgun Gothic"/>
+              </a:rPr>
+              <a:t>3. </a:t>
             </a:r>
             <a:r>
               <a:rPr sz="1400" b="1" i="0">
@@ -18638,11 +18696,40 @@
                 <a:ea typeface="Malgun Gothic"/>
                 <a:cs typeface="Malgun Gothic"/>
               </a:rPr>
-              <a:t> 접착 연결이 해체되어 세포가 서로 떨어진다. 전사인자 SNAIL, SLUG, ZEB, TWIST가 *CDH1*의 전사를 억제한다. 2. </a:t>
-            </a:r>
+              <a:t> 접착 연결이 해체되어 세포가 서로 떨어진다. 전사인자 SNAIL, SLUG, ZEB, TWIST가 *CDH1*의 전사를 억제한다.</a:t>
+            </a:r>
+          </a:p>
+          <a:p>
+            <a:pPr>
+              <a:spcAft>
+                <a:spcPts val="900"/>
+              </a:spcAft>
+            </a:pPr>
             <a:r>
               <a:rPr sz="1400" b="1" i="0">
                 <a:solidFill>
+                  <a:srgbClr val="F2B705"/>
+                </a:solidFill>
+                <a:latin typeface="Malgun Gothic"/>
+                <a:ea typeface="Malgun Gothic"/>
+                <a:cs typeface="Malgun Gothic"/>
+              </a:rPr>
+              <a:t>•  </a:t>
+            </a:r>
+            <a:r>
+              <a:rPr sz="1400" b="0" i="0">
+                <a:solidFill>
+                  <a:srgbClr val="11202B"/>
+                </a:solidFill>
+                <a:latin typeface="Malgun Gothic"/>
+                <a:ea typeface="Malgun Gothic"/>
+                <a:cs typeface="Malgun Gothic"/>
+              </a:rPr>
+              <a:t>2. </a:t>
+            </a:r>
+            <a:r>
+              <a:rPr sz="1400" b="1" i="0">
+                <a:solidFill>
                   <a:srgbClr val="11202B"/>
                 </a:solidFill>
                 <a:latin typeface="Malgun Gothic"/>
@@ -18660,11 +18747,40 @@
                 <a:ea typeface="Malgun Gothic"/>
                 <a:cs typeface="Malgun Gothic"/>
               </a:rPr>
-              <a:t> 상피형 접착에서 중간엽형 접착으로 바뀐다. 3. </a:t>
-            </a:r>
+              <a:t> 상피형 접착에서 중간엽형 접착으로 바뀐다.</a:t>
+            </a:r>
+          </a:p>
+          <a:p>
+            <a:pPr>
+              <a:spcAft>
+                <a:spcPts val="900"/>
+              </a:spcAft>
+            </a:pPr>
             <a:r>
               <a:rPr sz="1400" b="1" i="0">
                 <a:solidFill>
+                  <a:srgbClr val="F2B705"/>
+                </a:solidFill>
+                <a:latin typeface="Malgun Gothic"/>
+                <a:ea typeface="Malgun Gothic"/>
+                <a:cs typeface="Malgun Gothic"/>
+              </a:rPr>
+              <a:t>•  </a:t>
+            </a:r>
+            <a:r>
+              <a:rPr sz="1400" b="0" i="0">
+                <a:solidFill>
+                  <a:srgbClr val="11202B"/>
+                </a:solidFill>
+                <a:latin typeface="Malgun Gothic"/>
+                <a:ea typeface="Malgun Gothic"/>
+                <a:cs typeface="Malgun Gothic"/>
+              </a:rPr>
+              <a:t>3. </a:t>
+            </a:r>
+            <a:r>
+              <a:rPr sz="1400" b="1" i="0">
+                <a:solidFill>
                   <a:srgbClr val="11202B"/>
                 </a:solidFill>
                 <a:latin typeface="Malgun Gothic"/>
@@ -18682,7 +18798,36 @@
                 <a:ea typeface="Malgun Gothic"/>
                 <a:cs typeface="Malgun Gothic"/>
               </a:rPr>
-              <a:t> 세포의 기계적 성질이 변형에 유리한 쪽으로 바뀐다. 4. </a:t>
+              <a:t> 세포의 기계적 성질이 변형에 유리한 쪽으로 바뀐다.</a:t>
+            </a:r>
+          </a:p>
+          <a:p>
+            <a:pPr>
+              <a:spcAft>
+                <a:spcPts val="900"/>
+              </a:spcAft>
+            </a:pPr>
+            <a:r>
+              <a:rPr sz="1400" b="1" i="0">
+                <a:solidFill>
+                  <a:srgbClr val="F2B705"/>
+                </a:solidFill>
+                <a:latin typeface="Malgun Gothic"/>
+                <a:ea typeface="Malgun Gothic"/>
+                <a:cs typeface="Malgun Gothic"/>
+              </a:rPr>
+              <a:t>•  </a:t>
+            </a:r>
+            <a:r>
+              <a:rPr sz="1400" b="0" i="0">
+                <a:solidFill>
+                  <a:srgbClr val="11202B"/>
+                </a:solidFill>
+                <a:latin typeface="Malgun Gothic"/>
+                <a:ea typeface="Malgun Gothic"/>
+                <a:cs typeface="Malgun Gothic"/>
+              </a:rPr>
+              <a:t>4. </a:t>
             </a:r>
             <a:r>
               <a:rPr sz="1400" b="1" i="0">
